--- a/output/education/archive/2026-03-21_multi-agent-ai-healthcare/multi-agent-ai_slides_allstaff.pptx
+++ b/output/education/archive/2026-03-21_multi-agent-ai-healthcare/multi-agent-ai_slides_allstaff.pptx
@@ -3133,10 +3133,12 @@
               </a:defRPr>
             </a:pPr>
             <a:r>
+              <a:rPr/>
               <a:t>AIが病院で</a:t>
             </a:r>
             <a:br/>
             <a:r>
+              <a:rPr/>
               <a:t>どう使われ始めているか</a:t>
             </a:r>
           </a:p>
@@ -3173,6 +3175,7 @@
               </a:defRPr>
             </a:pPr>
             <a:r>
+              <a:rPr/>
               <a:t>最新研究から見える未来</a:t>
             </a:r>
           </a:p>
@@ -3217,7 +3220,9 @@
           <a:bodyPr rtlCol="0" anchor="ctr"/>
           <a:lstStyle/>
           <a:p>
-            <a:pPr algn="ctr"/>
+            <a:pPr algn="ctr">
+              <a:defRPr/>
+            </a:pPr>
           </a:p>
         </p:txBody>
       </p:sp>
@@ -3252,6 +3257,7 @@
               </a:defRPr>
             </a:pPr>
             <a:r>
+              <a:rPr/>
               <a:t>全スタッフ向け｜15分｜2026-03-21</a:t>
             </a:r>
           </a:p>
@@ -3292,7 +3298,7 @@
         <p:spPr>
           <a:xfrm>
             <a:off x="731520" y="274320"/>
-            <a:ext cx="7315200" cy="457200"/>
+            <a:ext cx="7315200" cy="589279"/>
           </a:xfrm>
           <a:prstGeom prst="rect">
             <a:avLst/>
@@ -3314,6 +3320,7 @@
               </a:defRPr>
             </a:pPr>
             <a:r>
+              <a:rPr/>
               <a:t>AIって結局なに？</a:t>
             </a:r>
           </a:p>
@@ -3327,8 +3334,8 @@
         </p:nvSpPr>
         <p:spPr>
           <a:xfrm>
-            <a:off x="731520" y="731520"/>
-            <a:ext cx="2743200" cy="274320"/>
+            <a:off x="731520" y="881887"/>
+            <a:ext cx="2743200" cy="340360"/>
           </a:xfrm>
           <a:prstGeom prst="rect">
             <a:avLst/>
@@ -3350,6 +3357,7 @@
               </a:defRPr>
             </a:pPr>
             <a:r>
+              <a:rPr/>
               <a:t>まずはここから！</a:t>
             </a:r>
           </a:p>
@@ -3396,7 +3404,9 @@
           <a:bodyPr rtlCol="0" anchor="ctr"/>
           <a:lstStyle/>
           <a:p>
-            <a:pPr algn="ctr"/>
+            <a:pPr algn="ctr">
+              <a:defRPr/>
+            </a:pPr>
           </a:p>
         </p:txBody>
       </p:sp>
@@ -3408,7 +3418,7 @@
         </p:nvSpPr>
         <p:spPr>
           <a:xfrm>
-            <a:off x="914400" y="1188720"/>
+            <a:off x="914400" y="1240535"/>
             <a:ext cx="7315200" cy="914400"/>
           </a:xfrm>
           <a:prstGeom prst="rect">
@@ -3431,14 +3441,17 @@
               </a:defRPr>
             </a:pPr>
             <a:r>
+              <a:rPr/>
               <a:t>💡 「ChatGPTに質問したことがある人？」→ きっと多い</a:t>
             </a:r>
             <a:br/>
             <a:r>
+              <a:rPr/>
               <a:t>💡 「AIに仕事を任せたことがある人？」→ きっと少ない</a:t>
             </a:r>
             <a:br/>
             <a:r>
+              <a:rPr/>
               <a:t>→ ここが今日のテーマ！</a:t>
             </a:r>
           </a:p>
@@ -3453,7 +3466,7 @@
         <p:spPr>
           <a:xfrm>
             <a:off x="731520" y="2468880"/>
-            <a:ext cx="2743200" cy="274320"/>
+            <a:ext cx="2743200" cy="340360"/>
           </a:xfrm>
           <a:prstGeom prst="rect">
             <a:avLst/>
@@ -3475,6 +3488,7 @@
               </a:defRPr>
             </a:pPr>
             <a:r>
+              <a:rPr/>
               <a:t>今日のゴール</a:t>
             </a:r>
           </a:p>
@@ -3488,7 +3502,7 @@
         </p:nvSpPr>
         <p:spPr>
           <a:xfrm>
-            <a:off x="731520" y="2788920"/>
+            <a:off x="731520" y="2827528"/>
             <a:ext cx="7680960" cy="914400"/>
           </a:xfrm>
           <a:prstGeom prst="rect">
@@ -3512,6 +3526,7 @@
               <a:buChar char="●"/>
             </a:pPr>
             <a:r>
+              <a:rPr/>
               <a:t>「AIエージェント」がどういうものかイメージできる</a:t>
             </a:r>
           </a:p>
@@ -3526,6 +3541,7 @@
               <a:buChar char="●"/>
             </a:pPr>
             <a:r>
+              <a:rPr/>
               <a:t>医療AIが自分の業務にどう関わるか考えられる</a:t>
             </a:r>
           </a:p>
@@ -3588,10 +3604,12 @@
               </a:defRPr>
             </a:pPr>
             <a:r>
+              <a:rPr/>
               <a:t>「質問に答えるAI」から</a:t>
             </a:r>
             <a:br/>
             <a:r>
+              <a:rPr/>
               <a:t>「仕事をするAI」へ</a:t>
             </a:r>
           </a:p>
@@ -3926,7 +3944,7 @@
         <p:spPr>
           <a:xfrm>
             <a:off x="731520" y="2651760"/>
-            <a:ext cx="2743200" cy="274320"/>
+            <a:ext cx="2743200" cy="340360"/>
           </a:xfrm>
           <a:prstGeom prst="rect">
             <a:avLst/>
@@ -3948,6 +3966,7 @@
               </a:defRPr>
             </a:pPr>
             <a:r>
+              <a:rPr/>
               <a:t>身近な例</a:t>
             </a:r>
           </a:p>
@@ -3961,7 +3980,7 @@
         </p:nvSpPr>
         <p:spPr>
           <a:xfrm>
-            <a:off x="731520" y="2971800"/>
+            <a:off x="731520" y="3010408"/>
             <a:ext cx="7680960" cy="1371600"/>
           </a:xfrm>
           <a:prstGeom prst="rect">
@@ -3985,6 +4004,7 @@
               <a:buChar char="●"/>
             </a:pPr>
             <a:r>
+              <a:rPr/>
               <a:t>「検査結果をチェックして異常値があったら教えて」</a:t>
             </a:r>
           </a:p>
@@ -3999,6 +4019,7 @@
               <a:buChar char="●"/>
             </a:pPr>
             <a:r>
+              <a:rPr/>
               <a:t>「退院サマリーの下書きを作って」</a:t>
             </a:r>
           </a:p>
@@ -4013,6 +4034,7 @@
               <a:buChar char="●"/>
             </a:pPr>
             <a:r>
+              <a:rPr/>
               <a:t>「患者データを集計してグラフにして」</a:t>
             </a:r>
           </a:p>
@@ -4053,7 +4075,7 @@
         <p:spPr>
           <a:xfrm>
             <a:off x="731520" y="274320"/>
-            <a:ext cx="7315200" cy="457200"/>
+            <a:ext cx="7315200" cy="518159"/>
           </a:xfrm>
           <a:prstGeom prst="rect">
             <a:avLst/>
@@ -4075,6 +4097,7 @@
               </a:defRPr>
             </a:pPr>
             <a:r>
+              <a:rPr/>
               <a:t>チームで働くAI</a:t>
             </a:r>
           </a:p>
@@ -4088,8 +4111,8 @@
         </p:nvSpPr>
         <p:spPr>
           <a:xfrm>
-            <a:off x="731520" y="731520"/>
-            <a:ext cx="4572000" cy="274320"/>
+            <a:off x="731520" y="810767"/>
+            <a:ext cx="4572000" cy="304799"/>
           </a:xfrm>
           <a:prstGeom prst="rect">
             <a:avLst/>
@@ -4111,6 +4134,7 @@
               </a:defRPr>
             </a:pPr>
             <a:r>
+              <a:rPr/>
               <a:t>Mount Sinai病院の研究:</a:t>
             </a:r>
           </a:p>
@@ -4124,8 +4148,8 @@
         </p:nvSpPr>
         <p:spPr>
           <a:xfrm>
-            <a:off x="731520" y="1005840"/>
-            <a:ext cx="7680960" cy="365760"/>
+            <a:off x="731520" y="1133854"/>
+            <a:ext cx="7680960" cy="375920"/>
           </a:xfrm>
           <a:prstGeom prst="rect">
             <a:avLst/>
@@ -4147,6 +4171,7 @@
               </a:defRPr>
             </a:pPr>
             <a:r>
+              <a:rPr/>
               <a:t>「AIも、1人より「チーム」の方が良い仕事をする」</a:t>
             </a:r>
           </a:p>
@@ -4467,7 +4492,9 @@
           <a:bodyPr rtlCol="0" anchor="ctr"/>
           <a:lstStyle/>
           <a:p>
-            <a:pPr algn="ctr"/>
+            <a:pPr algn="ctr">
+              <a:defRPr/>
+            </a:pPr>
           </a:p>
         </p:txBody>
       </p:sp>
@@ -4479,7 +4506,7 @@
         </p:nvSpPr>
         <p:spPr>
           <a:xfrm>
-            <a:off x="6126480" y="1481328"/>
+            <a:off x="6126480" y="1528062"/>
             <a:ext cx="1097280" cy="502920"/>
           </a:xfrm>
           <a:prstGeom prst="rect">
@@ -4502,6 +4529,7 @@
               </a:defRPr>
             </a:pPr>
             <a:r>
+              <a:rPr/>
               <a:t>正確</a:t>
             </a:r>
           </a:p>
@@ -4515,7 +4543,7 @@
         </p:nvSpPr>
         <p:spPr>
           <a:xfrm>
-            <a:off x="7223760" y="1481328"/>
+            <a:off x="7223760" y="1528062"/>
             <a:ext cx="1280160" cy="502920"/>
           </a:xfrm>
           <a:prstGeom prst="rect">
@@ -4538,6 +4566,7 @@
               </a:defRPr>
             </a:pPr>
             <a:r>
+              <a:rPr/>
               <a:t>チームAI &gt; 1人のAI</a:t>
             </a:r>
           </a:p>
@@ -4582,7 +4611,9 @@
           <a:bodyPr rtlCol="0" anchor="ctr"/>
           <a:lstStyle/>
           <a:p>
-            <a:pPr algn="ctr"/>
+            <a:pPr algn="ctr">
+              <a:defRPr/>
+            </a:pPr>
           </a:p>
         </p:txBody>
       </p:sp>
@@ -4617,6 +4648,7 @@
               </a:defRPr>
             </a:pPr>
             <a:r>
+              <a:rPr/>
               <a:t>65分の1</a:t>
             </a:r>
           </a:p>
@@ -4653,6 +4685,7 @@
               </a:defRPr>
             </a:pPr>
             <a:r>
+              <a:rPr/>
               <a:t>コスト削減</a:t>
             </a:r>
           </a:p>
@@ -4697,7 +4730,9 @@
           <a:bodyPr rtlCol="0" anchor="ctr"/>
           <a:lstStyle/>
           <a:p>
-            <a:pPr algn="ctr"/>
+            <a:pPr algn="ctr">
+              <a:defRPr/>
+            </a:pPr>
           </a:p>
         </p:txBody>
       </p:sp>
@@ -4732,6 +4767,7 @@
               </a:defRPr>
             </a:pPr>
             <a:r>
+              <a:rPr/>
               <a:t>品質維持</a:t>
             </a:r>
           </a:p>
@@ -4768,6 +4804,7 @@
               </a:defRPr>
             </a:pPr>
             <a:r>
+              <a:rPr/>
               <a:t>仕事が増えても</a:t>
             </a:r>
           </a:p>
@@ -4782,7 +4819,7 @@
         <p:spPr>
           <a:xfrm>
             <a:off x="731520" y="3383280"/>
-            <a:ext cx="7680960" cy="365760"/>
+            <a:ext cx="7680960" cy="375920"/>
           </a:xfrm>
           <a:prstGeom prst="rect">
             <a:avLst/>
@@ -4804,6 +4841,7 @@
               </a:defRPr>
             </a:pPr>
             <a:r>
+              <a:rPr/>
               <a:t>まさに、チーム医療のAI版！</a:t>
             </a:r>
           </a:p>
@@ -4844,7 +4882,7 @@
         <p:spPr>
           <a:xfrm>
             <a:off x="731520" y="274320"/>
-            <a:ext cx="7315200" cy="457200"/>
+            <a:ext cx="7315200" cy="518159"/>
           </a:xfrm>
           <a:prstGeom prst="rect">
             <a:avLst/>
@@ -4866,6 +4904,7 @@
               </a:defRPr>
             </a:pPr>
             <a:r>
+              <a:rPr/>
               <a:t>AIは味方です</a:t>
             </a:r>
           </a:p>
@@ -4912,7 +4951,9 @@
           <a:bodyPr rtlCol="0" anchor="ctr"/>
           <a:lstStyle/>
           <a:p>
-            <a:pPr algn="ctr"/>
+            <a:pPr algn="ctr">
+              <a:defRPr/>
+            </a:pPr>
           </a:p>
         </p:txBody>
       </p:sp>
@@ -4925,7 +4966,7 @@
         <p:spPr>
           <a:xfrm>
             <a:off x="868680" y="868680"/>
-            <a:ext cx="7315200" cy="320040"/>
+            <a:ext cx="7315200" cy="340360"/>
           </a:xfrm>
           <a:prstGeom prst="rect">
             <a:avLst/>
@@ -4947,6 +4988,7 @@
               </a:defRPr>
             </a:pPr>
             <a:r>
+              <a:rPr/>
               <a:t>⚠️ よくある心配とお答え</a:t>
             </a:r>
           </a:p>
@@ -4960,7 +5002,7 @@
         </p:nvSpPr>
         <p:spPr>
           <a:xfrm>
-            <a:off x="868680" y="1188720"/>
+            <a:off x="868680" y="1227328"/>
             <a:ext cx="7315200" cy="1005840"/>
           </a:xfrm>
           <a:prstGeom prst="rect">
@@ -4983,23 +5025,28 @@
               </a:defRPr>
             </a:pPr>
             <a:r>
+              <a:rPr/>
               <a:t>「仕事を奪われるのでは？」</a:t>
             </a:r>
             <a:br/>
             <a:r>
+              <a:rPr/>
               <a:t>→ 電子カルテ導入で人が不要になりましたか？むしろ人間にしかできない</a:t>
             </a:r>
             <a:br/>
             <a:r>
+              <a:rPr/>
               <a:t>  業務に集中できるようになった。AIも同じです。</a:t>
             </a:r>
             <a:br/>
             <a:br/>
             <a:r>
+              <a:rPr/>
               <a:t>「信頼できるの？」</a:t>
             </a:r>
             <a:br/>
             <a:r>
+              <a:rPr/>
               <a:t>→ だからこそ「チーム」が大事。1つのAIが間違えても、他がチェックする。</a:t>
             </a:r>
           </a:p>
@@ -5036,10 +5083,12 @@
               </a:defRPr>
             </a:pPr>
             <a:r>
+              <a:rPr/>
               <a:t>AIが得意なこと → 定型作業、データ処理、パターン検出</a:t>
             </a:r>
             <a:br/>
             <a:r>
+              <a:rPr/>
               <a:t>人間が得意なこと → 共感、判断、患者さんとの対話</a:t>
             </a:r>
           </a:p>
@@ -5080,7 +5129,7 @@
         <p:spPr>
           <a:xfrm>
             <a:off x="731520" y="274320"/>
-            <a:ext cx="7315200" cy="457200"/>
+            <a:ext cx="7315200" cy="589279"/>
           </a:xfrm>
           <a:prstGeom prst="rect">
             <a:avLst/>
@@ -5102,6 +5151,7 @@
               </a:defRPr>
             </a:pPr>
             <a:r>
+              <a:rPr/>
               <a:t>みんなで考えよう</a:t>
             </a:r>
           </a:p>
@@ -5115,8 +5165,8 @@
         </p:nvSpPr>
         <p:spPr>
           <a:xfrm>
-            <a:off x="731520" y="731520"/>
-            <a:ext cx="2743200" cy="320040"/>
+            <a:off x="731520" y="881887"/>
+            <a:ext cx="2743200" cy="340360"/>
           </a:xfrm>
           <a:prstGeom prst="rect">
             <a:avLst/>
@@ -5138,6 +5188,7 @@
               </a:defRPr>
             </a:pPr>
             <a:r>
+              <a:rPr/>
               <a:t>グループワーク｜3分間</a:t>
             </a:r>
           </a:p>
@@ -5182,7 +5233,9 @@
           <a:bodyPr rtlCol="0" anchor="ctr"/>
           <a:lstStyle/>
           <a:p>
-            <a:pPr algn="ctr"/>
+            <a:pPr algn="ctr">
+              <a:defRPr/>
+            </a:pPr>
           </a:p>
         </p:txBody>
       </p:sp>
@@ -5227,7 +5280,9 @@
           <a:bodyPr rtlCol="0" anchor="ctr"/>
           <a:lstStyle/>
           <a:p>
-            <a:pPr algn="ctr"/>
+            <a:pPr algn="ctr">
+              <a:defRPr/>
+            </a:pPr>
           </a:p>
         </p:txBody>
       </p:sp>
@@ -5262,14 +5317,17 @@
               </a:defRPr>
             </a:pPr>
             <a:r>
+              <a:rPr/>
               <a:t>あなたの業務の中で、</a:t>
             </a:r>
             <a:br/>
             <a:r>
+              <a:rPr/>
               <a:t>「これ、AIに手伝ってもらえたら助かるなぁ」</a:t>
             </a:r>
             <a:br/>
             <a:r>
+              <a:rPr/>
               <a:t>と思うことはありますか？</a:t>
             </a:r>
           </a:p>
@@ -5284,7 +5342,7 @@
         <p:spPr>
           <a:xfrm>
             <a:off x="731520" y="2423160"/>
-            <a:ext cx="2743200" cy="274320"/>
+            <a:ext cx="2743200" cy="340360"/>
           </a:xfrm>
           <a:prstGeom prst="rect">
             <a:avLst/>
@@ -5306,6 +5364,7 @@
               </a:defRPr>
             </a:pPr>
             <a:r>
+              <a:rPr/>
               <a:t>考えるヒント</a:t>
             </a:r>
           </a:p>
@@ -5319,7 +5378,7 @@
         </p:nvSpPr>
         <p:spPr>
           <a:xfrm>
-            <a:off x="731520" y="2743200"/>
+            <a:off x="731520" y="2781808"/>
             <a:ext cx="7680960" cy="1097280"/>
           </a:xfrm>
           <a:prstGeom prst="rect">
@@ -5343,6 +5402,7 @@
               <a:buChar char="●"/>
             </a:pPr>
             <a:r>
+              <a:rPr/>
               <a:t>毎日繰り返している定型作業は？</a:t>
             </a:r>
           </a:p>
@@ -5357,6 +5417,7 @@
               <a:buChar char="●"/>
             </a:pPr>
             <a:r>
+              <a:rPr/>
               <a:t>「もう1人いたらなぁ」と思う場面は？</a:t>
             </a:r>
           </a:p>
@@ -5371,6 +5432,7 @@
               <a:buChar char="●"/>
             </a:pPr>
             <a:r>
+              <a:rPr/>
               <a:t>データの入力や転記で時間を取られることは？</a:t>
             </a:r>
           </a:p>
@@ -5411,7 +5473,7 @@
         <p:spPr>
           <a:xfrm>
             <a:off x="731520" y="274320"/>
-            <a:ext cx="7315200" cy="457200"/>
+            <a:ext cx="7315200" cy="518159"/>
           </a:xfrm>
           <a:prstGeom prst="rect">
             <a:avLst/>
@@ -5433,6 +5495,7 @@
               </a:defRPr>
             </a:pPr>
             <a:r>
+              <a:rPr/>
               <a:t>これからどうなる？</a:t>
             </a:r>
           </a:p>
@@ -5703,7 +5766,9 @@
           <a:bodyPr rtlCol="0" anchor="ctr"/>
           <a:lstStyle/>
           <a:p>
-            <a:pPr algn="ctr"/>
+            <a:pPr algn="ctr">
+              <a:defRPr/>
+            </a:pPr>
           </a:p>
         </p:txBody>
       </p:sp>
@@ -5738,19 +5803,23 @@
               </a:defRPr>
             </a:pPr>
             <a:r>
+              <a:rPr/>
               <a:t>テクノロジーは変わっても、</a:t>
             </a:r>
             <a:br/>
             <a:r>
+              <a:rPr/>
               <a:t>患者さんの手を握れるのは、あなただけです。</a:t>
             </a:r>
             <a:br/>
             <a:br/>
             <a:r>
+              <a:rPr/>
               <a:t>AIが得意なことはAIに。</a:t>
             </a:r>
             <a:br/>
             <a:r>
+              <a:rPr/>
               <a:t>人間にしかできないことに、もっと時間を使えるように。</a:t>
             </a:r>
           </a:p>
@@ -5765,7 +5834,7 @@
         <p:spPr>
           <a:xfrm>
             <a:off x="731520" y="4480560"/>
-            <a:ext cx="3657600" cy="274320"/>
+            <a:ext cx="3657600" cy="287020"/>
           </a:xfrm>
           <a:prstGeom prst="rect">
             <a:avLst/>
@@ -5787,6 +5856,7 @@
               </a:defRPr>
             </a:pPr>
             <a:r>
+              <a:rPr/>
               <a:t>📎 参考文献リスト（別紙配布）</a:t>
             </a:r>
           </a:p>
